--- a/shared-memory-data-exchange-template.pptx.pptx
+++ b/shared-memory-data-exchange-template.pptx.pptx
@@ -5900,7 +5900,7 @@
         </p:nvSpPr>
         <p:spPr>
           <a:xfrm flipH="false" flipV="false" rot="0">
-            <a:off x="-753513" y="6685836"/>
+            <a:off x="-730239" y="6424851"/>
             <a:ext cx="9717329" cy="974646"/>
           </a:xfrm>
           <a:custGeom>
@@ -5915,10 +5915,10 @@
                   <a:pt x="0" y="0"/>
                 </a:moveTo>
                 <a:lnTo>
-                  <a:pt x="9717329" y="0"/>
-                </a:lnTo>
-                <a:lnTo>
-                  <a:pt x="9717329" y="974645"/>
+                  <a:pt x="9717328" y="0"/>
+                </a:lnTo>
+                <a:lnTo>
+                  <a:pt x="9717328" y="974645"/>
                 </a:lnTo>
                 <a:lnTo>
                   <a:pt x="0" y="974645"/>
@@ -5946,48 +5946,7 @@
       </p:sp>
       <p:sp>
         <p:nvSpPr>
-          <p:cNvPr name="TextBox 9" id="9"/>
-          <p:cNvSpPr txBox="true"/>
-          <p:nvPr/>
-        </p:nvSpPr>
-        <p:spPr>
-          <a:xfrm rot="0">
-            <a:off x="1341187" y="2662476"/>
-            <a:ext cx="8434407" cy="4023360"/>
-          </a:xfrm>
-          <a:prstGeom prst="rect">
-            <a:avLst/>
-          </a:prstGeom>
-        </p:spPr>
-        <p:txBody>
-          <a:bodyPr anchor="t" rtlCol="false" tIns="0" lIns="0" bIns="0" rIns="0">
-            <a:spAutoFit/>
-          </a:bodyPr>
-          <a:lstStyle/>
-          <a:p>
-            <a:pPr algn="l">
-              <a:lnSpc>
-                <a:spcPts val="8640"/>
-              </a:lnSpc>
-            </a:pPr>
-            <a:r>
-              <a:rPr lang="en-US" sz="7200" b="true">
-                <a:solidFill>
-                  <a:srgbClr val="144778"/>
-                </a:solidFill>
-                <a:latin typeface="Milk Tea Font TH Bold"/>
-                <a:ea typeface="Milk Tea Font TH Bold"/>
-                <a:cs typeface="Milk Tea Font TH Bold"/>
-                <a:sym typeface="Milk Tea Font TH Bold"/>
-              </a:rPr>
-              <a:t>Shared Memory Data Exchange System</a:t>
-            </a:r>
-          </a:p>
-        </p:txBody>
-      </p:sp>
-      <p:sp>
-        <p:nvSpPr>
-          <p:cNvPr name="Freeform 10" id="10"/>
+          <p:cNvPr name="Freeform 9" id="9"/>
           <p:cNvSpPr/>
           <p:nvPr/>
         </p:nvSpPr>
@@ -6039,14 +5998,14 @@
       </p:sp>
       <p:sp>
         <p:nvSpPr>
-          <p:cNvPr name="Freeform 11" id="11"/>
+          <p:cNvPr name="Freeform 10" id="10"/>
           <p:cNvSpPr/>
           <p:nvPr/>
         </p:nvSpPr>
         <p:spPr>
           <a:xfrm flipH="false" flipV="false" rot="0">
-            <a:off x="-225922" y="0"/>
-            <a:ext cx="6906932" cy="2960114"/>
+            <a:off x="0" y="0"/>
+            <a:ext cx="5820112" cy="2182542"/>
           </a:xfrm>
           <a:custGeom>
             <a:avLst/>
@@ -6055,18 +6014,18 @@
             <a:cxnLst/>
             <a:rect r="r" b="b" t="t" l="l"/>
             <a:pathLst>
-              <a:path h="2960114" w="6906932">
+              <a:path h="2182542" w="5820112">
                 <a:moveTo>
                   <a:pt x="0" y="0"/>
                 </a:moveTo>
                 <a:lnTo>
-                  <a:pt x="6906931" y="0"/>
-                </a:lnTo>
-                <a:lnTo>
-                  <a:pt x="6906931" y="2960114"/>
-                </a:lnTo>
-                <a:lnTo>
-                  <a:pt x="0" y="2960114"/>
+                  <a:pt x="5820112" y="0"/>
+                </a:lnTo>
+                <a:lnTo>
+                  <a:pt x="5820112" y="2182542"/>
+                </a:lnTo>
+                <a:lnTo>
+                  <a:pt x="0" y="2182542"/>
                 </a:lnTo>
                 <a:lnTo>
                   <a:pt x="0" y="0"/>
@@ -6085,13 +6044,54 @@
       </p:sp>
       <p:sp>
         <p:nvSpPr>
+          <p:cNvPr name="TextBox 11" id="11"/>
+          <p:cNvSpPr txBox="true"/>
+          <p:nvPr/>
+        </p:nvSpPr>
+        <p:spPr>
+          <a:xfrm rot="0">
+            <a:off x="1341187" y="2662476"/>
+            <a:ext cx="8434407" cy="3286125"/>
+          </a:xfrm>
+          <a:prstGeom prst="rect">
+            <a:avLst/>
+          </a:prstGeom>
+        </p:spPr>
+        <p:txBody>
+          <a:bodyPr anchor="t" rtlCol="false" tIns="0" lIns="0" bIns="0" rIns="0">
+            <a:spAutoFit/>
+          </a:bodyPr>
+          <a:lstStyle/>
+          <a:p>
+            <a:pPr algn="l">
+              <a:lnSpc>
+                <a:spcPts val="8640"/>
+              </a:lnSpc>
+            </a:pPr>
+            <a:r>
+              <a:rPr lang="en-US" sz="7200" b="true">
+                <a:solidFill>
+                  <a:srgbClr val="144778"/>
+                </a:solidFill>
+                <a:latin typeface="Milk Tea Font TH Bold"/>
+                <a:ea typeface="Milk Tea Font TH Bold"/>
+                <a:cs typeface="Milk Tea Font TH Bold"/>
+                <a:sym typeface="Milk Tea Font TH Bold"/>
+              </a:rPr>
+              <a:t>Shared Memory Data Exchange System</a:t>
+            </a:r>
+          </a:p>
+        </p:txBody>
+      </p:sp>
+      <p:sp>
+        <p:nvSpPr>
           <p:cNvPr name="TextBox 12" id="12"/>
           <p:cNvSpPr txBox="true"/>
           <p:nvPr/>
         </p:nvSpPr>
         <p:spPr>
           <a:xfrm rot="0">
-            <a:off x="1341187" y="6957746"/>
+            <a:off x="1364461" y="6696761"/>
             <a:ext cx="7589520" cy="450485"/>
           </a:xfrm>
           <a:prstGeom prst="rect">
@@ -6484,7 +6484,7 @@
         </p:nvSpPr>
         <p:spPr>
           <a:xfrm rot="0">
-            <a:off x="4665825" y="3513464"/>
+            <a:off x="4819320" y="3560012"/>
             <a:ext cx="9447660" cy="1816366"/>
           </a:xfrm>
           <a:prstGeom prst="rect">
@@ -9426,7 +9426,7 @@
         </p:nvSpPr>
         <p:spPr>
           <a:xfrm rot="0">
-            <a:off x="1028700" y="1906691"/>
+            <a:off x="1299850" y="2302347"/>
             <a:ext cx="13432591" cy="7538344"/>
           </a:xfrm>
           <a:prstGeom prst="rect">
